--- a/slides/decks/s11-organ-complications.pptx
+++ b/slides/decks/s11-organ-complications.pptx
@@ -134,20 +134,20 @@
   <p:extLst>
     <p:ext uri="{521415D9-36F7-43E2-AB2F-B90AF26B5E84}">
       <p14:sectionLst xmlns:p14="http://schemas.microsoft.com/office/powerpoint/2010/main">
-        <p14:section name="Opening" id="{b0cbae2e-b223-d7b6-f5ad-00092b1b75c1}">
+        <p14:section name="Opening" id="{233f6492-61fd-88b9-dac1-2ba9963aefd8}">
           <p14:sldIdLst>
             <p14:sldId id="256"/>
             <p14:sldId id="257"/>
           </p14:sldIdLst>
         </p14:section>
-        <p14:section name="Bleeding and thrombosis" id="{f26aa00c-c9a0-856e-9e16-f3119cbdef11}">
+        <p14:section name="Bleeding and thrombosis" id="{3affa26e-a771-2897-cb43-0f17fdf2e2fe}">
           <p14:sldIdLst>
             <p14:sldId id="258"/>
             <p14:sldId id="259"/>
             <p14:sldId id="260"/>
           </p14:sldIdLst>
         </p14:section>
-        <p14:section name="Haemorrhagic cystitis and kidney" id="{40d8eeb5-bc97-9fa5-b014-943cfeab119b}">
+        <p14:section name="Haemorrhagic cystitis and kidney" id="{d0fa7567-910c-65d8-27b1-95d970036d5f}">
           <p14:sldIdLst>
             <p14:sldId id="261"/>
             <p14:sldId id="262"/>
@@ -155,7 +155,7 @@
             <p14:sldId id="264"/>
           </p14:sldIdLst>
         </p14:section>
-        <p14:section name="Noninfectious lung complications" id="{c5de449b-d321-c41e-4bc5-46c33f627cb0}">
+        <p14:section name="Noninfectious lung complications" id="{f450d85b-c868-00d1-b759-9c31485a9ad2}">
           <p14:sldIdLst>
             <p14:sldId id="265"/>
             <p14:sldId id="266"/>
@@ -163,14 +163,14 @@
             <p14:sldId id="268"/>
           </p14:sldIdLst>
         </p14:section>
-        <p14:section name="Nervous system" id="{8c6ed8e4-fa67-635d-ce99-16dd9519dfaf}">
+        <p14:section name="Nervous system" id="{21ca100c-b486-ebe6-4309-ad17bfb81692}">
           <p14:sldIdLst>
             <p14:sldId id="269"/>
             <p14:sldId id="270"/>
             <p14:sldId id="271"/>
           </p14:sldIdLst>
         </p14:section>
-        <p14:section name="Board questions" id="{609b5fce-ae65-a5ca-93af-c5c66ca55522}">
+        <p14:section name="Board questions" id="{c3c6848f-272d-f3cb-1a58-fcb64af712bd}">
           <p14:sldIdLst>
             <p14:sldId id="272"/>
             <p14:sldId id="273"/>
@@ -180,13 +180,13 @@
             <p14:sldId id="277"/>
           </p14:sldIdLst>
         </p14:section>
-        <p14:section name="References" id="{83102769-a3ad-3bc1-e898-f6b5502f1d15}">
+        <p14:section name="References" id="{3da66cfb-df14-1e78-223d-370a654d3d4b}">
           <p14:sldIdLst>
             <p14:sldId id="278"/>
             <p14:sldId id="279"/>
           </p14:sldIdLst>
         </p14:section>
-        <p14:section name="Backup" id="{0e1447e7-1529-f010-222c-4b464b27cda8}">
+        <p14:section name="Backup" id="{dd3dde4a-d7bf-10d9-cf35-46e606b06ba8}">
           <p14:sldIdLst>
             <p14:sldId id="280"/>
             <p14:sldId id="281"/>
@@ -5339,7 +5339,7 @@
                   <a:schemeClr val="tx1"/>
                 </a:solidFill>
               </a:rPr>
-              <a:t>IPS is widespread alveolar injury with infection excluded</a:t>
+              <a:t>IPS is widespread alveolar injury in the absence of infection</a:t>
             </a:r>
             <a:endParaRPr lang="en-US" sz="3600" dirty="0"/>
           </a:p>
@@ -6257,7 +6257,7 @@
                   <a:schemeClr val="tx1"/>
                 </a:solidFill>
               </a:rPr>
-              <a:t>DAH is diagnosed by progressively bloodier BAL returns</a:t>
+              <a:t>DAH is diagnosed when serial BAL aliquots turn progressively bloodier</a:t>
             </a:r>
             <a:endParaRPr lang="en-US" sz="3600" dirty="0"/>
           </a:p>
@@ -7777,7 +7777,7 @@
                             <a:schemeClr val="tx1"/>
                           </a:solidFill>
                         </a:rPr>
-                        <a:t>changes; no parenchymal opacity</a:t>
+                        <a:t>changes; no opacities</a:t>
                       </a:r>
                       <a:endParaRPr lang="en-US" sz="1600" dirty="0"/>
                     </a:p>
@@ -8796,7 +8796,7 @@
                   <a:schemeClr val="tx1"/>
                 </a:solidFill>
               </a:rPr>
-              <a:t>FAM: fluticasone, azithromycin, montelukast</a:t>
+              <a:t>FAM (fluticasone, azithro, montelukast)</a:t>
             </a:r>
             <a:endParaRPr lang="en-US" sz="1500" dirty="0"/>
           </a:p>
@@ -12121,7 +12121,7 @@
                   <a:schemeClr val="tx1"/>
                 </a:solidFill>
               </a:rPr>
-              <a:t>Question 1: haematuria four weeks after haplo-HCT</a:t>
+              <a:t>Question 1: haematuria on day 28</a:t>
             </a:r>
             <a:endParaRPr lang="en-US" sz="3600" dirty="0"/>
           </a:p>
@@ -12173,7 +12173,7 @@
         </p:nvSpPr>
         <p:spPr>
           <a:xfrm>
-            <a:off x="685800" y="2194560"/>
+            <a:off x="685800" y="1737360"/>
             <a:ext cx="10817352" cy="1453896"/>
           </a:xfrm>
           <a:prstGeom prst="rect">
@@ -12209,8 +12209,8 @@
         </p:nvSpPr>
         <p:spPr>
           <a:xfrm>
-            <a:off x="960120" y="3922776"/>
-            <a:ext cx="10543032" cy="1975104"/>
+            <a:off x="960120" y="3465576"/>
+            <a:ext cx="10543032" cy="2432304"/>
           </a:xfrm>
           <a:prstGeom prst="rect">
             <a:avLst/>
@@ -12448,7 +12448,7 @@
                   <a:schemeClr val="tx1"/>
                 </a:solidFill>
               </a:rPr>
-              <a:t>Answer B: late-onset HC around engraftment is BK-driven</a:t>
+              <a:t>Answer B: BK virus drives late-onset HC</a:t>
             </a:r>
             <a:endParaRPr lang="en-US" sz="3600" dirty="0"/>
           </a:p>
@@ -12500,7 +12500,7 @@
         </p:nvSpPr>
         <p:spPr>
           <a:xfrm>
-            <a:off x="685800" y="2240280"/>
+            <a:off x="685800" y="1783080"/>
             <a:ext cx="10817352" cy="731520"/>
           </a:xfrm>
           <a:prstGeom prst="rect">
@@ -12542,8 +12542,8 @@
         </p:nvSpPr>
         <p:spPr>
           <a:xfrm>
-            <a:off x="685800" y="3246120"/>
-            <a:ext cx="10817352" cy="2651760"/>
+            <a:off x="685800" y="2788920"/>
+            <a:ext cx="10817352" cy="3108960"/>
           </a:xfrm>
           <a:prstGeom prst="rect">
             <a:avLst/>
@@ -12710,7 +12710,7 @@
                   <a:schemeClr val="tx1"/>
                 </a:solidFill>
               </a:rPr>
-              <a:t>Question 2: breathlessness 14 months after allo-HCT</a:t>
+              <a:t>Question 2: breathlessness at 14 months</a:t>
             </a:r>
             <a:endParaRPr lang="en-US" sz="3600" dirty="0"/>
           </a:p>
@@ -12762,7 +12762,7 @@
         </p:nvSpPr>
         <p:spPr>
           <a:xfrm>
-            <a:off x="685800" y="2194560"/>
+            <a:off x="685800" y="1737360"/>
             <a:ext cx="10817352" cy="1453896"/>
           </a:xfrm>
           <a:prstGeom prst="rect">
@@ -12784,7 +12784,7 @@
                   <a:schemeClr val="tx1"/>
                 </a:solidFill>
               </a:rPr>
-              <a:t>A 48-year-old woman with oral and skin chronic GVHD has progressive dyspnoea 14 months after allo-HCT. FEV1/VC is 0.62, FEV1 58% of predicted (25% below baseline), RV 140% of predicted, with no bronchodilator response. CT shows mosaic attenuation and air trapping without parenchymal opacities. BAL is negative. Which statement is correct?</a:t>
+              <a:t>A 48-year-old woman with oral and skin chronic GVHD has progressive dyspnoea 14 months after allo-HCT. FEV1/VC 0.62, FEV1 58% of predicted (25% below baseline), RV 140%, no bronchodilator response. CT: mosaic attenuation and air trapping, no parenchymal opacity. BAL is negative. Which statement is correct?</a:t>
             </a:r>
             <a:endParaRPr lang="en-US" sz="1900" dirty="0"/>
           </a:p>
@@ -12798,8 +12798,8 @@
         </p:nvSpPr>
         <p:spPr>
           <a:xfrm>
-            <a:off x="960120" y="3922776"/>
-            <a:ext cx="10543032" cy="1975104"/>
+            <a:off x="960120" y="3465576"/>
+            <a:ext cx="10543032" cy="2432304"/>
           </a:xfrm>
           <a:prstGeom prst="rect">
             <a:avLst/>
@@ -14193,7 +14193,7 @@
         <p:spPr>
           <a:xfrm>
             <a:off x="685800" y="2194560"/>
-            <a:ext cx="10817352" cy="1783080"/>
+            <a:ext cx="10817352" cy="1453896"/>
           </a:xfrm>
           <a:prstGeom prst="rect">
             <a:avLst/>
@@ -14214,7 +14214,7 @@
                   <a:schemeClr val="tx1"/>
                 </a:solidFill>
               </a:rPr>
-              <a:t>A 55-year-old man is 20 days after busulfan-cyclophosphamide MAC and matched unrelated HCT on cyclosporine and methotrexate. Voriconazole was started on day 14 for probable aspergillosis. He develops headache, cortical blindness and a generalized seizure. BP is 182/104 mmHg and creatinine has doubled. MRI shows bilateral subcortical parieto-occipital T2 hyperintensity. Best next step?</a:t>
+              <a:t>A 55-year-old man on cyclosporine and methotrexate is 20 days after busulfan-cyclophosphamide MAC and MUD HCT; voriconazole began on day 14. He develops headache, cortical blindness and a seizure. BP is 182/104 mmHg; creatinine has doubled. MRI: bilateral subcortical parieto-occipital T2 hyperintensity. Best next step?</a:t>
             </a:r>
             <a:endParaRPr lang="en-US" sz="1900" dirty="0"/>
           </a:p>
@@ -14228,8 +14228,8 @@
         </p:nvSpPr>
         <p:spPr>
           <a:xfrm>
-            <a:off x="960120" y="4251960"/>
-            <a:ext cx="10543032" cy="1645920"/>
+            <a:off x="960120" y="3922776"/>
+            <a:ext cx="10543032" cy="1975104"/>
           </a:xfrm>
           <a:prstGeom prst="rect">
             <a:avLst/>
@@ -15441,7 +15441,7 @@
                   <a:schemeClr val="tx1"/>
                 </a:solidFill>
               </a:rPr>
-              <a:t>Two scores estimate VTE risk after allogeneic HCT</a:t>
+              <a:t>Two scores estimate VTE risk after allo-HCT</a:t>
             </a:r>
             <a:endParaRPr lang="en-US" sz="3600" dirty="0"/>
           </a:p>
@@ -17079,7 +17079,7 @@
                             <a:schemeClr val="tx1"/>
                           </a:solidFill>
                         </a:rPr>
-                        <a:t>BKPyV or adenovirus cystitis, retroperitoneal fibrosis, nodes</a:t>
+                        <a:t>BK or adenovirus cystitis, retroperitoneal fibrosis, nodes</a:t>
                       </a:r>
                       <a:endParaRPr lang="en-US" sz="1800" dirty="0"/>
                     </a:p>
@@ -17250,7 +17250,7 @@
                   <a:schemeClr val="tx1"/>
                 </a:solidFill>
               </a:rPr>
-              <a:t>VTE and bleeding are also common after CAR-T therapy</a:t>
+              <a:t>CAR-T also carries VTE and bleeding risk</a:t>
             </a:r>
             <a:endParaRPr lang="en-US" sz="3600" dirty="0"/>
           </a:p>
@@ -17309,7 +17309,7 @@
           </p:nvPr>
         </p:nvGraphicFramePr>
         <p:xfrm>
-          <a:off x="685800" y="2240280"/>
+          <a:off x="685800" y="1783080"/>
           <a:ext cx="10817352" cy="914400"/>
         </p:xfrm>
         <a:graphic>
@@ -18129,7 +18129,7 @@
                   <a:schemeClr val="tx1"/>
                 </a:solidFill>
               </a:rPr>
-              <a:t>Early bronchoscopy anchors the pulmonary work-up</a:t>
+              <a:t>Early bronchoscopy anchors the lung work-up</a:t>
             </a:r>
             <a:endParaRPr lang="en-US" sz="3600" dirty="0"/>
           </a:p>
@@ -18509,7 +18509,7 @@
                   <a:schemeClr val="tx1"/>
                 </a:solidFill>
               </a:rPr>
-              <a:t>BAL gives a diagnosis in up to 78%; a pathogen in ~50% of suspected IPS; FOB complications &lt; 5%. Fluid overload, the most frequent cause, affects up to 60%.</a:t>
+              <a:t>BAL gives a diagnosis in up to 78%; a pathogen in ~50% of suspected IPS; FOB complications &lt; 5%. Fluid-overload oedema, the most frequent lung complication, is not in the ATS classification.</a:t>
             </a:r>
             <a:endParaRPr lang="en-US" sz="1700" dirty="0"/>
           </a:p>
@@ -20552,14 +20552,14 @@
                         <a:buNone/>
                       </a:pPr>
                       <a:r>
-                        <a:rPr lang="en-US" sz="1500" b="1" dirty="0">
+                        <a:rPr lang="en-US" sz="1600" b="1" dirty="0">
                           <a:solidFill>
                             <a:schemeClr val="tx1"/>
                           </a:solidFill>
                         </a:rPr>
                         <a:t>Question</a:t>
                       </a:r>
-                      <a:endParaRPr lang="en-US" sz="1500" dirty="0"/>
+                      <a:endParaRPr lang="en-US" sz="1600" dirty="0"/>
                     </a:p>
                   </a:txBody>
                   <a:tcPr marL="25400" marR="101600" marT="63500" marB="63500" anchor="ctr">
@@ -20598,14 +20598,14 @@
                         <a:buNone/>
                       </a:pPr>
                       <a:r>
-                        <a:rPr lang="en-US" sz="1500" b="1" dirty="0">
+                        <a:rPr lang="en-US" sz="1600" b="1" dirty="0">
                           <a:solidFill>
                             <a:schemeClr val="tx1"/>
                           </a:solidFill>
                         </a:rPr>
                         <a:t>Ch. 40 recommendation</a:t>
                       </a:r>
-                      <a:endParaRPr lang="en-US" sz="1500" dirty="0"/>
+                      <a:endParaRPr lang="en-US" sz="1600" dirty="0"/>
                     </a:p>
                   </a:txBody>
                   <a:tcPr marL="25400" marR="101600" marT="63500" marB="63500" anchor="ctr">
@@ -20646,14 +20646,14 @@
                         <a:buNone/>
                       </a:pPr>
                       <a:r>
-                        <a:rPr lang="en-US" sz="1500" dirty="0">
+                        <a:rPr lang="en-US" sz="1600" dirty="0">
                           <a:solidFill>
                             <a:schemeClr val="tx1"/>
                           </a:solidFill>
                         </a:rPr>
                         <a:t>Start therapeutic dose</a:t>
                       </a:r>
-                      <a:endParaRPr lang="en-US" sz="1500" dirty="0"/>
+                      <a:endParaRPr lang="en-US" sz="1600" dirty="0"/>
                     </a:p>
                   </a:txBody>
                   <a:tcPr marL="25400" marR="101600" marT="63500" marB="63500" anchor="ctr">
@@ -20686,14 +20686,14 @@
                         <a:buNone/>
                       </a:pPr>
                       <a:r>
-                        <a:rPr lang="en-US" sz="1500" dirty="0">
+                        <a:rPr lang="en-US" sz="1600" dirty="0">
                           <a:solidFill>
                             <a:schemeClr val="tx1"/>
                           </a:solidFill>
                         </a:rPr>
                         <a:t>Platelets &gt; 50 × 10⁹/L and no active bleeding</a:t>
                       </a:r>
-                      <a:endParaRPr lang="en-US" sz="1500" dirty="0"/>
+                      <a:endParaRPr lang="en-US" sz="1600" dirty="0"/>
                     </a:p>
                   </a:txBody>
                   <a:tcPr marL="25400" marR="101600" marT="63500" marB="63500" anchor="ctr">
@@ -20728,14 +20728,14 @@
                         <a:buNone/>
                       </a:pPr>
                       <a:r>
-                        <a:rPr lang="en-US" sz="1500" dirty="0">
+                        <a:rPr lang="en-US" sz="1600" dirty="0">
                           <a:solidFill>
                             <a:schemeClr val="tx1"/>
                           </a:solidFill>
                         </a:rPr>
                         <a:t>LMWH or UFH?</a:t>
                       </a:r>
-                      <a:endParaRPr lang="en-US" sz="1500" dirty="0"/>
+                      <a:endParaRPr lang="en-US" sz="1600" dirty="0"/>
                     </a:p>
                   </a:txBody>
                   <a:tcPr marL="25400" marR="101600" marT="63500" marB="63500" anchor="ctr">
@@ -20768,14 +20768,14 @@
                         <a:buNone/>
                       </a:pPr>
                       <a:r>
-                        <a:rPr lang="en-US" sz="1500" dirty="0">
+                        <a:rPr lang="en-US" sz="1600" dirty="0">
                           <a:solidFill>
                             <a:schemeClr val="tx1"/>
                           </a:solidFill>
                         </a:rPr>
                         <a:t>UFH if GFR &lt; 30 mL/min or high bleeding risk</a:t>
                       </a:r>
-                      <a:endParaRPr lang="en-US" sz="1500" dirty="0"/>
+                      <a:endParaRPr lang="en-US" sz="1600" dirty="0"/>
                     </a:p>
                   </a:txBody>
                   <a:tcPr marL="25400" marR="101600" marT="63500" marB="63500" anchor="ctr">
@@ -20810,14 +20810,14 @@
                         <a:buNone/>
                       </a:pPr>
                       <a:r>
-                        <a:rPr lang="en-US" sz="1500" dirty="0">
+                        <a:rPr lang="en-US" sz="1600" dirty="0">
                           <a:solidFill>
                             <a:schemeClr val="tx1"/>
                           </a:solidFill>
                         </a:rPr>
                         <a:t>Platelets 25–50 × 10⁹/L</a:t>
                       </a:r>
-                      <a:endParaRPr lang="en-US" sz="1500" dirty="0"/>
+                      <a:endParaRPr lang="en-US" sz="1600" dirty="0"/>
                     </a:p>
                   </a:txBody>
                   <a:tcPr marL="25400" marR="101600" marT="63500" marB="63500" anchor="ctr">
@@ -20850,28 +20850,14 @@
                         <a:buNone/>
                       </a:pPr>
                       <a:r>
-                        <a:rPr lang="en-US" sz="1500" dirty="0">
+                        <a:rPr lang="en-US" sz="1600" dirty="0">
                           <a:solidFill>
                             <a:schemeClr val="tx1"/>
                           </a:solidFill>
                         </a:rPr>
-                        <a:t>Reduced-dose LMWH in some centres; or transfuse</a:t>
+                        <a:t>Reduced-dose LMWH (some centres); big clot: transfuse to 50</a:t>
                       </a:r>
-                      <a:endParaRPr lang="en-US" sz="1500" dirty="0"/>
-                    </a:p>
-                    <a:p>
-                      <a:pPr indent="0" marL="0">
-                        <a:buNone/>
-                      </a:pPr>
-                      <a:r>
-                        <a:rPr lang="en-US" sz="1500" dirty="0">
-                          <a:solidFill>
-                            <a:schemeClr val="tx1"/>
-                          </a:solidFill>
-                        </a:rPr>
-                        <a:t>to 50 × 10⁹/L for a large symptomatic clot</a:t>
-                      </a:r>
-                      <a:endParaRPr lang="en-US" sz="1500" dirty="0"/>
+                      <a:endParaRPr lang="en-US" sz="1600" dirty="0"/>
                     </a:p>
                   </a:txBody>
                   <a:tcPr marL="25400" marR="101600" marT="63500" marB="63500" anchor="ctr">
@@ -20906,14 +20892,14 @@
                         <a:buNone/>
                       </a:pPr>
                       <a:r>
-                        <a:rPr lang="en-US" sz="1500" dirty="0">
+                        <a:rPr lang="en-US" sz="1600" dirty="0">
                           <a:solidFill>
                             <a:schemeClr val="tx1"/>
                           </a:solidFill>
                         </a:rPr>
                         <a:t>Maintenance</a:t>
                       </a:r>
-                      <a:endParaRPr lang="en-US" sz="1500" dirty="0"/>
+                      <a:endParaRPr lang="en-US" sz="1600" dirty="0"/>
                     </a:p>
                   </a:txBody>
                   <a:tcPr marL="25400" marR="101600" marT="63500" marB="63500" anchor="ctr">
@@ -20946,14 +20932,14 @@
                         <a:buNone/>
                       </a:pPr>
                       <a:r>
-                        <a:rPr lang="en-US" sz="1500" dirty="0">
+                        <a:rPr lang="en-US" sz="1600" dirty="0">
                           <a:solidFill>
                             <a:schemeClr val="tx1"/>
                           </a:solidFill>
                         </a:rPr>
                         <a:t>LMWH, or warfarin; DOAC only case by case</a:t>
                       </a:r>
-                      <a:endParaRPr lang="en-US" sz="1500" dirty="0"/>
+                      <a:endParaRPr lang="en-US" sz="1600" dirty="0"/>
                     </a:p>
                   </a:txBody>
                   <a:tcPr marL="25400" marR="101600" marT="63500" marB="63500" anchor="ctr">
@@ -20988,14 +20974,14 @@
                         <a:buNone/>
                       </a:pPr>
                       <a:r>
-                        <a:rPr lang="en-US" sz="1500" dirty="0">
+                        <a:rPr lang="en-US" sz="1600" dirty="0">
                           <a:solidFill>
                             <a:schemeClr val="tx1"/>
                           </a:solidFill>
                         </a:rPr>
                         <a:t>Duration, VTE</a:t>
                       </a:r>
-                      <a:endParaRPr lang="en-US" sz="1500" dirty="0"/>
+                      <a:endParaRPr lang="en-US" sz="1600" dirty="0"/>
                     </a:p>
                   </a:txBody>
                   <a:tcPr marL="25400" marR="101600" marT="63500" marB="63500" anchor="ctr">
@@ -21028,14 +21014,14 @@
                         <a:buNone/>
                       </a:pPr>
                       <a:r>
-                        <a:rPr lang="en-US" sz="1500" dirty="0">
+                        <a:rPr lang="en-US" sz="1600" dirty="0">
                           <a:solidFill>
                             <a:schemeClr val="tx1"/>
                           </a:solidFill>
                         </a:rPr>
                         <a:t>3–6 months, longer while malignancy or IMiDs persist</a:t>
                       </a:r>
-                      <a:endParaRPr lang="en-US" sz="1500" dirty="0"/>
+                      <a:endParaRPr lang="en-US" sz="1600" dirty="0"/>
                     </a:p>
                   </a:txBody>
                   <a:tcPr marL="25400" marR="101600" marT="63500" marB="63500" anchor="ctr">
@@ -21070,14 +21056,14 @@
                         <a:buNone/>
                       </a:pPr>
                       <a:r>
-                        <a:rPr lang="en-US" sz="1500" dirty="0">
+                        <a:rPr lang="en-US" sz="1600" dirty="0">
                           <a:solidFill>
                             <a:schemeClr val="tx1"/>
                           </a:solidFill>
                         </a:rPr>
                         <a:t>Catheter-related thrombosis</a:t>
                       </a:r>
-                      <a:endParaRPr lang="en-US" sz="1500" dirty="0"/>
+                      <a:endParaRPr lang="en-US" sz="1600" dirty="0"/>
                     </a:p>
                   </a:txBody>
                   <a:tcPr marL="25400" marR="101600" marT="63500" marB="63500" anchor="ctr">
@@ -21110,28 +21096,14 @@
                         <a:buNone/>
                       </a:pPr>
                       <a:r>
-                        <a:rPr lang="en-US" sz="1500" dirty="0">
+                        <a:rPr lang="en-US" sz="1600" dirty="0">
                           <a:solidFill>
                             <a:schemeClr val="tx1"/>
                           </a:solidFill>
                         </a:rPr>
-                        <a:t>Anticoagulate; remove line only if</a:t>
+                        <a:t>Keep line unless nonfunctional, unneeded or infected</a:t>
                       </a:r>
-                      <a:endParaRPr lang="en-US" sz="1500" dirty="0"/>
-                    </a:p>
-                    <a:p>
-                      <a:pPr indent="0" marL="0">
-                        <a:buNone/>
-                      </a:pPr>
-                      <a:r>
-                        <a:rPr lang="en-US" sz="1500" dirty="0">
-                          <a:solidFill>
-                            <a:schemeClr val="tx1"/>
-                          </a:solidFill>
-                        </a:rPr>
-                        <a:t>nonfunctional, not needed or infected</a:t>
-                      </a:r>
-                      <a:endParaRPr lang="en-US" sz="1500" dirty="0"/>
+                      <a:endParaRPr lang="en-US" sz="1600" dirty="0"/>
                     </a:p>
                   </a:txBody>
                   <a:tcPr marL="25400" marR="101600" marT="63500" marB="63500" anchor="ctr">
@@ -21166,14 +21138,14 @@
                         <a:buNone/>
                       </a:pPr>
                       <a:r>
-                        <a:rPr lang="en-US" sz="1500" dirty="0">
+                        <a:rPr lang="en-US" sz="1600" dirty="0">
                           <a:solidFill>
                             <a:schemeClr val="tx1"/>
                           </a:solidFill>
                         </a:rPr>
                         <a:t>Duration, CRT</a:t>
                       </a:r>
-                      <a:endParaRPr lang="en-US" sz="1500" dirty="0"/>
+                      <a:endParaRPr lang="en-US" sz="1600" dirty="0"/>
                     </a:p>
                   </a:txBody>
                   <a:tcPr marL="25400" marR="101600" marT="63500" marB="63500" anchor="ctr">
@@ -21206,14 +21178,14 @@
                         <a:buNone/>
                       </a:pPr>
                       <a:r>
-                        <a:rPr lang="en-US" sz="1500" dirty="0">
+                        <a:rPr lang="en-US" sz="1600" dirty="0">
                           <a:solidFill>
                             <a:schemeClr val="tx1"/>
                           </a:solidFill>
                         </a:rPr>
                         <a:t>3 months or until line removed, whichever is longer</a:t>
                       </a:r>
-                      <a:endParaRPr lang="en-US" sz="1500" dirty="0"/>
+                      <a:endParaRPr lang="en-US" sz="1600" dirty="0"/>
                     </a:p>
                   </a:txBody>
                   <a:tcPr marL="25400" marR="101600" marT="63500" marB="63500" anchor="ctr">
@@ -21248,14 +21220,14 @@
                         <a:buNone/>
                       </a:pPr>
                       <a:r>
-                        <a:rPr lang="en-US" sz="1500" dirty="0">
+                        <a:rPr lang="en-US" sz="1600" dirty="0">
                           <a:solidFill>
                             <a:schemeClr val="tx1"/>
                           </a:solidFill>
                         </a:rPr>
                         <a:t>IVC filter</a:t>
                       </a:r>
-                      <a:endParaRPr lang="en-US" sz="1500" dirty="0"/>
+                      <a:endParaRPr lang="en-US" sz="1600" dirty="0"/>
                     </a:p>
                   </a:txBody>
                   <a:tcPr marL="25400" marR="101600" marT="63500" marB="63500" anchor="ctr">
@@ -21288,14 +21260,14 @@
                         <a:buNone/>
                       </a:pPr>
                       <a:r>
-                        <a:rPr lang="en-US" sz="1500" dirty="0">
+                        <a:rPr lang="en-US" sz="1600" dirty="0">
                           <a:solidFill>
                             <a:schemeClr val="tx1"/>
                           </a:solidFill>
                         </a:rPr>
                         <a:t>Only if anticoagulation contraindicated or PE on it</a:t>
                       </a:r>
-                      <a:endParaRPr lang="en-US" sz="1500" dirty="0"/>
+                      <a:endParaRPr lang="en-US" sz="1600" dirty="0"/>
                     </a:p>
                   </a:txBody>
                   <a:tcPr marL="25400" marR="101600" marT="63500" marB="63500" anchor="ctr">
@@ -21464,7 +21436,7 @@
                   <a:schemeClr val="tx1"/>
                 </a:solidFill>
               </a:rPr>
-              <a:t>Early HC is chemical; late HC is driven by BK polyomavirus</a:t>
+              <a:t>Early HC is chemical, late HC is viral</a:t>
             </a:r>
             <a:endParaRPr lang="en-US" sz="3600" dirty="0"/>
           </a:p>
@@ -21523,7 +21495,7 @@
           </p:nvPr>
         </p:nvGraphicFramePr>
         <p:xfrm>
-          <a:off x="685800" y="2240280"/>
+          <a:off x="685800" y="1783080"/>
           <a:ext cx="10817352" cy="914400"/>
         </p:xfrm>
         <a:graphic>
@@ -22411,7 +22383,7 @@
         </p:nvSpPr>
         <p:spPr>
           <a:xfrm>
-            <a:off x="685800" y="5486400"/>
+            <a:off x="685800" y="4389120"/>
             <a:ext cx="10817352" cy="411480"/>
           </a:xfrm>
           <a:prstGeom prst="rect">
@@ -22791,7 +22763,7 @@
                   <a:schemeClr val="bg1"/>
                 </a:solidFill>
               </a:rPr>
-              <a:t>BKPyV viruria &gt; 10⁷ copies/mL (viraemia &gt; 10³ in two-thirds)</a:t>
+              <a:t>Viruria &gt; 10⁷ copies/mL (viraemia &gt; 10³ in ⅔)</a:t>
             </a:r>
             <a:endParaRPr lang="en-US" sz="1700" dirty="0"/>
           </a:p>
@@ -24182,7 +24154,7 @@
                   <a:schemeClr val="tx1"/>
                 </a:solidFill>
               </a:rPr>
-              <a:t>AKI affects 27–66% of allo-HCT recipients by day 100</a:t>
+              <a:t>AKI hits 27–66% of allo-HCT recipients</a:t>
             </a:r>
             <a:endParaRPr lang="en-US" sz="3600" dirty="0"/>
           </a:p>
@@ -24241,7 +24213,7 @@
           </p:nvPr>
         </p:nvGraphicFramePr>
         <p:xfrm>
-          <a:off x="685800" y="2240280"/>
+          <a:off x="685800" y="1783080"/>
           <a:ext cx="10817352" cy="914400"/>
         </p:xfrm>
         <a:graphic>
@@ -24785,7 +24757,7 @@
         </p:nvSpPr>
         <p:spPr>
           <a:xfrm>
-            <a:off x="685800" y="4206240"/>
+            <a:off x="685800" y="4343400"/>
             <a:ext cx="10817352" cy="411480"/>
           </a:xfrm>
           <a:prstGeom prst="rect">

--- a/slides/decks/s11-organ-complications.pptx
+++ b/slides/decks/s11-organ-complications.pptx
@@ -134,20 +134,20 @@
   <p:extLst>
     <p:ext uri="{521415D9-36F7-43E2-AB2F-B90AF26B5E84}">
       <p14:sectionLst xmlns:p14="http://schemas.microsoft.com/office/powerpoint/2010/main">
-        <p14:section name="Opening" id="{233f6492-61fd-88b9-dac1-2ba9963aefd8}">
+        <p14:section name="Opening" id="{a46e306d-563f-09e0-bf1b-60255f0dedc1}">
           <p14:sldIdLst>
             <p14:sldId id="256"/>
             <p14:sldId id="257"/>
           </p14:sldIdLst>
         </p14:section>
-        <p14:section name="Bleeding and thrombosis" id="{3affa26e-a771-2897-cb43-0f17fdf2e2fe}">
+        <p14:section name="Bleeding and thrombosis" id="{8a409479-2220-d5d2-9c18-1baebd827423}">
           <p14:sldIdLst>
             <p14:sldId id="258"/>
             <p14:sldId id="259"/>
             <p14:sldId id="260"/>
           </p14:sldIdLst>
         </p14:section>
-        <p14:section name="Haemorrhagic cystitis and kidney" id="{d0fa7567-910c-65d8-27b1-95d970036d5f}">
+        <p14:section name="Haemorrhagic cystitis and kidney" id="{5df69ef1-dec2-679f-92ce-a1d40cb7e622}">
           <p14:sldIdLst>
             <p14:sldId id="261"/>
             <p14:sldId id="262"/>
@@ -155,7 +155,7 @@
             <p14:sldId id="264"/>
           </p14:sldIdLst>
         </p14:section>
-        <p14:section name="Noninfectious lung complications" id="{f450d85b-c868-00d1-b759-9c31485a9ad2}">
+        <p14:section name="Noninfectious lung complications" id="{4dbb6953-3868-c8a7-5d4d-9f4a362b579b}">
           <p14:sldIdLst>
             <p14:sldId id="265"/>
             <p14:sldId id="266"/>
@@ -163,14 +163,14 @@
             <p14:sldId id="268"/>
           </p14:sldIdLst>
         </p14:section>
-        <p14:section name="Nervous system" id="{21ca100c-b486-ebe6-4309-ad17bfb81692}">
+        <p14:section name="Nervous system" id="{7b4fcbd7-ee96-4936-6ebb-2cb95e7788cf}">
           <p14:sldIdLst>
             <p14:sldId id="269"/>
             <p14:sldId id="270"/>
             <p14:sldId id="271"/>
           </p14:sldIdLst>
         </p14:section>
-        <p14:section name="Board questions" id="{c3c6848f-272d-f3cb-1a58-fcb64af712bd}">
+        <p14:section name="Board questions" id="{f2754951-9479-5e45-d200-23237c1c8822}">
           <p14:sldIdLst>
             <p14:sldId id="272"/>
             <p14:sldId id="273"/>
@@ -180,13 +180,13 @@
             <p14:sldId id="277"/>
           </p14:sldIdLst>
         </p14:section>
-        <p14:section name="References" id="{3da66cfb-df14-1e78-223d-370a654d3d4b}">
+        <p14:section name="References" id="{cdc24dc5-4016-269e-d4cf-4d52026a9e9a}">
           <p14:sldIdLst>
             <p14:sldId id="278"/>
             <p14:sldId id="279"/>
           </p14:sldIdLst>
         </p14:section>
-        <p14:section name="Backup" id="{dd3dde4a-d7bf-10d9-cf35-46e606b06ba8}">
+        <p14:section name="Backup" id="{a6d5ce3e-20cc-5088-0576-5f2304dc4e32}">
           <p14:sldIdLst>
             <p14:sldId id="280"/>
             <p14:sldId id="281"/>
